--- a/new_pres.pptx
+++ b/new_pres.pptx
@@ -22534,7 +22534,7 @@
               </a:defRPr>
             </a:pPr>
             <a:r>
-              <a:t>•  Budget handsets ($1–$50): 57.5% churn rate vs 41.0% for premium devices (&gt;\$150).</a:t>
+              <a:t>•  Budget handsets ($1–$50): 57.5% churn rate vs 41.0% for premium devices (&gt;$150).</a:t>
             </a:r>
           </a:p>
           <a:p>
